--- a/dist/slides/u1-w01-l04.pptx
+++ b/dist/slides/u1-w01-l04.pptx
@@ -2,20 +2,20 @@
 <file path=ppt/presentation.xml><?xml version="1.0" encoding="utf-8"?>
 <p:presentation xmlns:p="http://schemas.openxmlformats.org/presentationml/2006/main">
   <p:sldMasterIdLst>
-    <p:sldMasterId xmlns:r="http://schemas.openxmlformats.org/officeDocument/2006/relationships" id="2147483648" r:id="Rf9e18e5f0eed4fbd"/>
+    <p:sldMasterId xmlns:r="http://schemas.openxmlformats.org/officeDocument/2006/relationships" id="2147483648" r:id="R4841ac2a21994102"/>
   </p:sldMasterIdLst>
   <p:notesMasterIdLst>
-    <p:notesMasterId xmlns:r="http://schemas.openxmlformats.org/officeDocument/2006/relationships" r:id="R89919104620a4bd4"/>
+    <p:notesMasterId xmlns:r="http://schemas.openxmlformats.org/officeDocument/2006/relationships" r:id="Reec21e0078294225"/>
   </p:notesMasterIdLst>
   <p:sldIdLst>
-    <p:sldId xmlns:r="http://schemas.openxmlformats.org/officeDocument/2006/relationships" id="256" r:id="R3ab8664395604b36"/>
-    <p:sldId xmlns:r="http://schemas.openxmlformats.org/officeDocument/2006/relationships" id="257" r:id="R712d8e4b8c534281"/>
-    <p:sldId xmlns:r="http://schemas.openxmlformats.org/officeDocument/2006/relationships" id="258" r:id="R79c35a7a13734eee"/>
-    <p:sldId xmlns:r="http://schemas.openxmlformats.org/officeDocument/2006/relationships" id="259" r:id="R3957e6423b684b53"/>
-    <p:sldId xmlns:r="http://schemas.openxmlformats.org/officeDocument/2006/relationships" id="260" r:id="R72d792a9e11b423a"/>
-    <p:sldId xmlns:r="http://schemas.openxmlformats.org/officeDocument/2006/relationships" id="261" r:id="R162f8d61887f4ce9"/>
-    <p:sldId xmlns:r="http://schemas.openxmlformats.org/officeDocument/2006/relationships" id="262" r:id="Rf4b48d2745924798"/>
-    <p:sldId xmlns:r="http://schemas.openxmlformats.org/officeDocument/2006/relationships" id="263" r:id="Rbba700a1ac434c3c"/>
+    <p:sldId xmlns:r="http://schemas.openxmlformats.org/officeDocument/2006/relationships" id="256" r:id="R061f50e68bd54796"/>
+    <p:sldId xmlns:r="http://schemas.openxmlformats.org/officeDocument/2006/relationships" id="257" r:id="R3d1f3e5571a0472d"/>
+    <p:sldId xmlns:r="http://schemas.openxmlformats.org/officeDocument/2006/relationships" id="258" r:id="Rc767cad67dba4bd4"/>
+    <p:sldId xmlns:r="http://schemas.openxmlformats.org/officeDocument/2006/relationships" id="259" r:id="Rfb52344b2cfd4abe"/>
+    <p:sldId xmlns:r="http://schemas.openxmlformats.org/officeDocument/2006/relationships" id="260" r:id="R88e2acbe858b4d04"/>
+    <p:sldId xmlns:r="http://schemas.openxmlformats.org/officeDocument/2006/relationships" id="261" r:id="R301fdb1b3b0049a8"/>
+    <p:sldId xmlns:r="http://schemas.openxmlformats.org/officeDocument/2006/relationships" id="262" r:id="R71c36afec1734169"/>
+    <p:sldId xmlns:r="http://schemas.openxmlformats.org/officeDocument/2006/relationships" id="263" r:id="R9c29434286e64fde"/>
   </p:sldIdLst>
   <p:sldSz cx="12192000" cy="6858000"/>
   <p:notesSz cx="6858000" cy="9144000"/>
@@ -454,6 +454,11 @@
           </a:p>
           <a:p xmlns:a="http://schemas.openxmlformats.org/drawingml/2006/main">
             <a:r>
+              <a:t>Instructional strategy: Learning intention and transfer.</a:t>
+            </a:r>
+          </a:p>
+          <a:p xmlns:a="http://schemas.openxmlformats.org/drawingml/2006/main">
+            <a:r>
               <a:t>This is formative transfer practice, not an additional summative assessment. Let learners use their earlier notes while making their own design and test decisions.</a:t>
             </a:r>
           </a:p>
@@ -554,7 +559,12 @@
           </a:p>
           <a:p xmlns:a="http://schemas.openxmlformats.org/drawingml/2006/main">
             <a:r>
-              <a:t>Expected: independent expectation checks correctness; a trace locates the first wrong value; per-item cost varies with quantity while a fixed charge is added once. Use a small numerical example if needed.</a:t>
+              <a:t>Instructional strategy: Retrieval with peer explanation.</a:t>
+            </a:r>
+          </a:p>
+          <a:p xmlns:a="http://schemas.openxmlformats.org/drawingml/2006/main">
+            <a:r>
+              <a:t>Allow one minute of writing, two minutes comparing, then two minutes sharing corrections. Expected: an independent prediction checks correctness, a fixed charge applies once per order and a trace finds the first wrong value. Invite learners to use a small numerical example if language is a barrier.</a:t>
             </a:r>
           </a:p>
           <a:p xmlns:a="http://schemas.openxmlformats.org/drawingml/2006/main">
@@ -654,7 +664,12 @@
           </a:p>
           <a:p xmlns:a="http://schemas.openxmlformats.org/drawingml/2006/main">
             <a:r>
-              <a:t>Success criteria: correct input/process/output plan, readable saved script, three independently predicted tests, and an explanation of one line. Validation and conditional zero-order charging are beyond this task.</a:t>
+              <a:t>Instructional strategy: Requirement annotation.</a:t>
+            </a:r>
+          </a:p>
+          <a:p xmlns:a="http://schemas.openxmlformats.org/drawingml/2006/main">
+            <a:r>
+              <a:t>Learners underline the input, circle the two prices and mark the zero-order rule in their own notes. Ask everyone to predict whether quantity 0 costs $0 or $4 and explain. Correct $4 under this requirement. Success means an IPO plan, readable saved script, three predicted tests and an explanation of a line. Validation comes later.</a:t>
             </a:r>
           </a:p>
           <a:p xmlns:a="http://schemas.openxmlformats.org/drawingml/2006/main">
@@ -754,7 +769,12 @@
           </a:p>
           <a:p xmlns:a="http://schemas.openxmlformats.org/drawingml/2006/main">
             <a:r>
-              <a:t>Expected input quantity; calculation quantity × 2 + 4; output total cost. Suggested constants COVER_PRICE and HANDLING. Ask learners to draft their own sequence before opening a completed reference solution.</a:t>
+              <a:t>Instructional strategy: Independent design and peer critique.</a:t>
+            </a:r>
+          </a:p>
+          <a:p xmlns:a="http://schemas.openxmlformats.org/drawingml/2006/main">
+            <a:r>
+              <a:t>Five minutes independent design, three minutes partner walkthrough, two minutes revision. Expected quantity × 2 + 4, so two covers cost $8. Partners ask questions without writing the solution for each other. Support: offer a blank IPO frame. Stretch: explain how a change to handling would affect every order. Suggested names COVER_PRICE and HANDLING.</a:t>
             </a:r>
           </a:p>
           <a:p xmlns:a="http://schemas.openxmlformats.org/drawingml/2006/main">
@@ -854,7 +874,12 @@
           </a:p>
           <a:p xmlns:a="http://schemas.openxmlformats.org/drawingml/2006/main">
             <a:r>
-              <a:t>Reveal/model the first row verbally, then ask learners to cover the results and calculate all three independently. If the projector shows the full table, add a fresh quantity such as 3 ($10) to check independent reasoning.</a:t>
+              <a:t>Instructional strategy: Independent prediction with reduced support.</a:t>
+            </a:r>
+          </a:p>
+          <a:p xmlns:a="http://schemas.openxmlformats.org/drawingml/2006/main">
+            <a:r>
+              <a:t>Learners calculate all three cases individually before any program runs. Expected 0 × 2 + 4 = $4, 1 × 2 + 4 = $6 and 5 × 2 + 4 = $14. Ask for working, then compare in pairs. Keep answers in teacher notes so the slide does not give away the task. Support: model a different quantity, 2 gives $8. Stretch: find a test that distinguishes adding handling once from adding it per cover.</a:t>
             </a:r>
           </a:p>
           <a:p xmlns:a="http://schemas.openxmlformats.org/drawingml/2006/main">
@@ -954,7 +979,12 @@
           </a:p>
           <a:p xmlns:a="http://schemas.openxmlformats.org/drawingml/2006/main">
             <a:r>
-              <a:t>Reference: COVER_PRICE = 2; HANDLING = 4; quantity = int(input('Covers: ')); total = quantity * COVER_PRICE + HANDLING; print(f'Total: ${total}'). Scaffold with the badge example or a partially completed file; extension: change a fixed value and design a fresh test.</a:t>
+              <a:t>Instructional strategy: Independent practice with optional scaffolds.</a:t>
+            </a:r>
+          </a:p>
+          <a:p xmlns:a="http://schemas.openxmlformats.org/drawingml/2006/main">
+            <a:r>
+              <a:t>Allow independent work, with short teacher conferences. Offer the badge example or a partial file only to learners who need it, then ask them to explain the changed lines. Reference: COVER_PRICE = 2; HANDLING = 4; quantity = int(input('Covers: ')); total = quantity * COVER_PRICE + HANDLING; print(f'Total: ${total}'). Stretch: change one fixed value, design a fresh test and justify it. Do not introduce input validation in this task.</a:t>
             </a:r>
           </a:p>
           <a:p xmlns:a="http://schemas.openxmlformats.org/drawingml/2006/main">
@@ -1054,7 +1084,12 @@
           </a:p>
           <a:p xmlns:a="http://schemas.openxmlformats.org/drawingml/2006/main">
             <a:r>
-              <a:t>Check quantities 0, 1 and 5 against $4, $6 and $14. Suitable limitation: invalid text and negative quantities are not handled. Do not equate a plausible output with successful validation.</a:t>
+              <a:t>Instructional strategy: Peer feedback and self-explanation.</a:t>
+            </a:r>
+          </a:p>
+          <a:p xmlns:a="http://schemas.openxmlformats.org/drawingml/2006/main">
+            <a:r>
+              <a:t>Each learner explains while the partner checks against the requirement. Expected test results $4, $6, $14. Feedback should identify a specific match or mismatch, not just say good work. Learners revise their own code or explanation. A suitable limitation is that invalid text and negative quantities are not handled. Keep the original expectation if a run fails.</a:t>
             </a:r>
           </a:p>
           <a:p xmlns:a="http://schemas.openxmlformats.org/drawingml/2006/main">
@@ -1154,7 +1189,12 @@
           </a:p>
           <a:p xmlns:a="http://schemas.openxmlformats.org/drawingml/2006/main">
             <a:r>
-              <a:t>Expected $10. An independent prediction uses the stated rule rather than copying the program’s output. Next week builds on types, arithmetic and data representation. Identify learners needing setup or tracing support before moving on.</a:t>
+              <a:t>Instructional strategy: Independent exit ticket and reflection.</a:t>
+            </a:r>
+          </a:p>
+          <a:p xmlns:a="http://schemas.openxmlformats.org/drawingml/2006/main">
+            <a:r>
+              <a:t>Collect individual responses before showing the answer: $10. Ask for a specific check such as predicting zero, tracing a total or comparing an actual result. Use responses to identify learners needing setup, arithmetic or tracing support before next week’s types and operators. The task remains formative.</a:t>
             </a:r>
           </a:p>
           <a:p xmlns:a="http://schemas.openxmlformats.org/drawingml/2006/main">
@@ -1226,7 +1266,7 @@
           <p:cNvPr id="3" name="Title">
             <a:extLst xmlns:a="http://schemas.openxmlformats.org/drawingml/2006/main">
               <a:ext uri="{FF2B5EF4-FFF2-40B4-BE49-F238E27FC236}">
-                <a16:creationId xmlns:a16="http://schemas.microsoft.com/office/drawing/2014/main" id="{8EB70D3E-3073-4D42-8C57-53F2FAA72CDF}"/>
+                <a16:creationId xmlns:a16="http://schemas.microsoft.com/office/drawing/2014/main" id="{01D969B5-DC7A-4F31-B81C-F5C13B49E75F}"/>
               </a:ext>
             </a:extLst>
           </p:cNvPr>
@@ -1383,7 +1423,7 @@
           <p:cNvPr id="2" name="Subtitle">
             <a:extLst xmlns:a="http://schemas.openxmlformats.org/drawingml/2006/main">
               <a:ext uri="{FF2B5EF4-FFF2-40B4-BE49-F238E27FC236}">
-                <a16:creationId xmlns:a16="http://schemas.microsoft.com/office/drawing/2014/main" id="{8F8F790E-014C-46C6-9878-574330EAA63C}"/>
+                <a16:creationId xmlns:a16="http://schemas.microsoft.com/office/drawing/2014/main" id="{DE53B940-080C-4F26-BAC7-23325CFF97C8}"/>
               </a:ext>
             </a:extLst>
           </p:cNvPr>
@@ -1557,7 +1597,7 @@
           <p:cNvPr id="2" name="Section title">
             <a:extLst xmlns:a="http://schemas.openxmlformats.org/drawingml/2006/main">
               <a:ext uri="{FF2B5EF4-FFF2-40B4-BE49-F238E27FC236}">
-                <a16:creationId xmlns:a16="http://schemas.microsoft.com/office/drawing/2014/main" id="{3665627E-E38E-4AC3-B209-AAB2F9D8C842}"/>
+                <a16:creationId xmlns:a16="http://schemas.microsoft.com/office/drawing/2014/main" id="{6727E21D-D136-4098-AF5B-7E3619A45D34}"/>
               </a:ext>
             </a:extLst>
           </p:cNvPr>
@@ -1731,7 +1771,7 @@
           <p:cNvPr id="3" name="Title">
             <a:extLst xmlns:a="http://schemas.openxmlformats.org/drawingml/2006/main">
               <a:ext uri="{FF2B5EF4-FFF2-40B4-BE49-F238E27FC236}">
-                <a16:creationId xmlns:a16="http://schemas.microsoft.com/office/drawing/2014/main" id="{CF0B19C2-5DBB-4DA2-8D9D-1AF1C2FCD1CB}"/>
+                <a16:creationId xmlns:a16="http://schemas.microsoft.com/office/drawing/2014/main" id="{EBDDD111-F30C-402F-B4B7-58A9921979BE}"/>
               </a:ext>
             </a:extLst>
           </p:cNvPr>
@@ -1888,7 +1928,7 @@
           <p:cNvPr id="2" name="Body">
             <a:extLst xmlns:a="http://schemas.openxmlformats.org/drawingml/2006/main">
               <a:ext uri="{FF2B5EF4-FFF2-40B4-BE49-F238E27FC236}">
-                <a16:creationId xmlns:a16="http://schemas.microsoft.com/office/drawing/2014/main" id="{11D10A8F-5BF1-4D02-91E5-82838D4B5271}"/>
+                <a16:creationId xmlns:a16="http://schemas.microsoft.com/office/drawing/2014/main" id="{CB7355E9-548A-40E5-A897-926EDCB1590B}"/>
               </a:ext>
             </a:extLst>
           </p:cNvPr>
@@ -2062,7 +2102,7 @@
           <p:cNvPr id="4" name="Title">
             <a:extLst xmlns:a="http://schemas.openxmlformats.org/drawingml/2006/main">
               <a:ext uri="{FF2B5EF4-FFF2-40B4-BE49-F238E27FC236}">
-                <a16:creationId xmlns:a16="http://schemas.microsoft.com/office/drawing/2014/main" id="{3280AAB2-9B4C-44B8-B00F-C09D1FF009F8}"/>
+                <a16:creationId xmlns:a16="http://schemas.microsoft.com/office/drawing/2014/main" id="{D4251213-1E0B-4E5B-9A28-141323D3663E}"/>
               </a:ext>
             </a:extLst>
           </p:cNvPr>
@@ -2219,7 +2259,7 @@
           <p:cNvPr id="2" name="Left column">
             <a:extLst xmlns:a="http://schemas.openxmlformats.org/drawingml/2006/main">
               <a:ext uri="{FF2B5EF4-FFF2-40B4-BE49-F238E27FC236}">
-                <a16:creationId xmlns:a16="http://schemas.microsoft.com/office/drawing/2014/main" id="{B8595450-398A-4D27-B3A6-04D1272F14C1}"/>
+                <a16:creationId xmlns:a16="http://schemas.microsoft.com/office/drawing/2014/main" id="{2C38979D-B3AA-452C-BA9C-F550B3C8F44C}"/>
               </a:ext>
             </a:extLst>
           </p:cNvPr>
@@ -2376,7 +2416,7 @@
           <p:cNvPr id="3" name="Right column">
             <a:extLst xmlns:a="http://schemas.openxmlformats.org/drawingml/2006/main">
               <a:ext uri="{FF2B5EF4-FFF2-40B4-BE49-F238E27FC236}">
-                <a16:creationId xmlns:a16="http://schemas.microsoft.com/office/drawing/2014/main" id="{C9354BB4-81DE-423F-98C3-1AF7CCC853B5}"/>
+                <a16:creationId xmlns:a16="http://schemas.microsoft.com/office/drawing/2014/main" id="{0F880C75-6C83-4D47-9937-5C7A6B2C1BD6}"/>
               </a:ext>
             </a:extLst>
           </p:cNvPr>
@@ -2550,7 +2590,7 @@
           <p:cNvPr id="3" name="Title">
             <a:extLst xmlns:a="http://schemas.openxmlformats.org/drawingml/2006/main">
               <a:ext uri="{FF2B5EF4-FFF2-40B4-BE49-F238E27FC236}">
-                <a16:creationId xmlns:a16="http://schemas.microsoft.com/office/drawing/2014/main" id="{7C9DF156-4D36-4832-83DE-609E39F0298A}"/>
+                <a16:creationId xmlns:a16="http://schemas.microsoft.com/office/drawing/2014/main" id="{83608C3A-058E-423D-9851-3FCA92B47383}"/>
               </a:ext>
             </a:extLst>
           </p:cNvPr>
@@ -2707,7 +2747,7 @@
           <p:cNvPr id="2" name="Left column">
             <a:extLst xmlns:a="http://schemas.openxmlformats.org/drawingml/2006/main">
               <a:ext uri="{FF2B5EF4-FFF2-40B4-BE49-F238E27FC236}">
-                <a16:creationId xmlns:a16="http://schemas.microsoft.com/office/drawing/2014/main" id="{5B21751D-CE42-4A16-A693-E7B230B8FCA2}"/>
+                <a16:creationId xmlns:a16="http://schemas.microsoft.com/office/drawing/2014/main" id="{05C61E6A-BD4C-44CE-BD34-9EF9BD6B33DD}"/>
               </a:ext>
             </a:extLst>
           </p:cNvPr>
@@ -2902,12 +2942,12 @@
   </p:cSld>
   <p:clrMap bg1="lt1" tx1="dk1" bg2="lt2" tx2="dk2" accent1="accent1" accent2="accent2" accent3="accent3" accent4="accent4" accent5="accent5" accent6="accent6" hlink="hlink" folHlink="folHlink"/>
   <p:sldLayoutIdLst>
-    <p:sldLayoutId xmlns:r="http://schemas.openxmlformats.org/officeDocument/2006/relationships" id="2147483649" r:id="R00cfdc4969ec49f3"/>
-    <p:sldLayoutId xmlns:r="http://schemas.openxmlformats.org/officeDocument/2006/relationships" id="2147483650" r:id="R6ff4433263344356"/>
-    <p:sldLayoutId xmlns:r="http://schemas.openxmlformats.org/officeDocument/2006/relationships" id="2147483651" r:id="R822805885642439b"/>
-    <p:sldLayoutId xmlns:r="http://schemas.openxmlformats.org/officeDocument/2006/relationships" id="2147483652" r:id="R699d2adfd0064f1a"/>
-    <p:sldLayoutId xmlns:r="http://schemas.openxmlformats.org/officeDocument/2006/relationships" id="2147483653" r:id="R390a8c5bd24f4741"/>
-    <p:sldLayoutId xmlns:r="http://schemas.openxmlformats.org/officeDocument/2006/relationships" id="2147483654" r:id="R6543d8760dd749ed"/>
+    <p:sldLayoutId xmlns:r="http://schemas.openxmlformats.org/officeDocument/2006/relationships" id="2147483649" r:id="R399f747e81354cb7"/>
+    <p:sldLayoutId xmlns:r="http://schemas.openxmlformats.org/officeDocument/2006/relationships" id="2147483650" r:id="Rcf057914b7594b5a"/>
+    <p:sldLayoutId xmlns:r="http://schemas.openxmlformats.org/officeDocument/2006/relationships" id="2147483651" r:id="R9618c3790d0c45d2"/>
+    <p:sldLayoutId xmlns:r="http://schemas.openxmlformats.org/officeDocument/2006/relationships" id="2147483652" r:id="Red938a1828e84cec"/>
+    <p:sldLayoutId xmlns:r="http://schemas.openxmlformats.org/officeDocument/2006/relationships" id="2147483653" r:id="R7b73e4f8668c48fd"/>
+    <p:sldLayoutId xmlns:r="http://schemas.openxmlformats.org/officeDocument/2006/relationships" id="2147483654" r:id="Ra4d6fc02b61a4d53"/>
   </p:sldLayoutIdLst>
   <p:txStyles>
     <p:titleStyle>
@@ -3458,7 +3498,7 @@
           <ns0:cNvPr id="5" name="Build a book-cover calculator">
             <ns1:extLst>
               <ns1:ext uri="{FF2B5EF4-FFF2-40B4-BE49-F238E27FC236}">
-                <ns2:creationId id="{4A7FE180-0234-4F06-8755-2285D93BB750}"/>
+                <ns2:creationId id="{983CD84D-23FC-4456-8BBC-A3150722A725}"/>
               </ns1:ext>
             </ns1:extLst>
           </ns0:cNvPr>
@@ -3526,7 +3566,7 @@
           <ns0:cNvPr id="2" name="Unit 1 · Week 1 · Lesson 4">
             <ns1:extLst>
               <ns1:ext uri="{FF2B5EF4-FFF2-40B4-BE49-F238E27FC236}">
-                <ns2:creationId id="{51CC6B6B-D33B-4999-9462-AB1185FD7D86}"/>
+                <ns2:creationId id="{E0A11985-6075-43E2-877C-6997A50A10F0}"/>
               </ns1:ext>
             </ns1:extLst>
           </ns0:cNvPr>
@@ -3592,7 +3632,7 @@
           <ns0:cNvPr id="3" name="Plan, implement, test and explain a new problem.">
             <ns1:extLst>
               <ns1:ext uri="{FF2B5EF4-FFF2-40B4-BE49-F238E27FC236}">
-                <ns2:creationId id="{2DF78C8B-56E4-4961-A144-59C3EFB9F04F}"/>
+                <ns2:creationId id="{B4069488-002F-4850-B00E-DA863BAE4D38}"/>
               </ns1:ext>
             </ns1:extLst>
           </ns0:cNvPr>
@@ -3658,7 +3698,7 @@
           <ns0:cNvPr id="4" name="U1-W01-L04  ·  1/8  ·  Content CC BY 4.0 / code MIT">
             <ns1:extLst>
               <ns1:ext uri="{FF2B5EF4-FFF2-40B4-BE49-F238E27FC236}">
-                <ns2:creationId id="{80B5EF32-4620-4B17-A593-793AA2CBE6F0}"/>
+                <ns2:creationId id="{41810B49-1F65-4F07-9947-B090501848E4}"/>
               </ns1:ext>
             </ns1:extLst>
           </ns0:cNvPr>
@@ -3722,7 +3762,7 @@
     </ns0:spTree>
     <ns0:extLst>
       <ns0:ext uri="{BB962C8B-B14F-4D97-AF65-F5344CB8AC3E}">
-        <ns3:creationId val="1983951511"/>
+        <ns3:creationId val="1421827637"/>
       </ns0:ext>
     </ns0:extLst>
   </ns0:cSld>
@@ -3750,10 +3790,10 @@
       </ns0:grpSpPr>
       <ns0:sp>
         <ns0:nvSpPr>
-          <ns0:cNvPr id="6" name="Retrieve a useful test habit">
+          <ns0:cNvPr id="7" name="Retrieve a useful test habit">
             <ns1:extLst>
               <ns1:ext uri="{FF2B5EF4-FFF2-40B4-BE49-F238E27FC236}">
-                <ns2:creationId id="{3944FA32-FC52-4FA2-A8AE-86154400C220}"/>
+                <ns2:creationId id="{9CFF2E75-0EA7-4183-AA6F-2B90CF7D0DBD}"/>
               </ns1:ext>
             </ns1:extLst>
           </ns0:cNvPr>
@@ -3818,10 +3858,10 @@
       </ns0:sp>
       <ns0:sp>
         <ns0:nvSpPr>
-          <ns0:cNvPr id="2" name="Why predict output before running?">
+          <ns0:cNvPr id="2" name="Write why we predict before running.">
             <ns1:extLst>
               <ns1:ext uri="{FF2B5EF4-FFF2-40B4-BE49-F238E27FC236}">
-                <ns2:creationId id="{6B80DB69-640F-4722-A58D-BCAEECEBEF64}"/>
+                <ns2:creationId id="{8C1DD411-1BE4-447F-9BA7-46123CE7D7E8}"/>
               </ns1:ext>
             </ns1:extLst>
           </ns0:cNvPr>
@@ -3877,17 +3917,17 @@
                 <ns1:ea typeface="Arial"/>
                 <ns1:cs typeface="Arial"/>
               </ns1:rPr>
-              <ns1:t>Why predict output before running?</ns1:t>
+              <ns1:t>Write why we predict before running.</ns1:t>
             </ns1:r>
           </ns1:p>
         </ns0:txBody>
       </ns0:sp>
       <ns0:sp>
         <ns0:nvSpPr>
-          <ns0:cNvPr id="3" name="How does a trace help find a mistake?">
+          <ns0:cNvPr id="3" name="Explain a fixed charge using the badge example.">
             <ns1:extLst>
               <ns1:ext uri="{FF2B5EF4-FFF2-40B4-BE49-F238E27FC236}">
-                <ns2:creationId id="{5C08AFD3-848F-4BE2-A28F-55428C58C26B}"/>
+                <ns2:creationId id="{FB06F610-9DD6-4678-B4F9-EC2FD82EDA2C}"/>
               </ns1:ext>
             </ns1:extLst>
           </ns0:cNvPr>
@@ -3943,17 +3983,17 @@
                 <ns1:ea typeface="Arial"/>
                 <ns1:cs typeface="Arial"/>
               </ns1:rPr>
-              <ns1:t>How does a trace help find a mistake?</ns1:t>
+              <ns1:t>Explain a fixed charge using the badge example.</ns1:t>
             </ns1:r>
           </ns1:p>
         </ns0:txBody>
       </ns0:sp>
       <ns0:sp>
         <ns0:nvSpPr>
-          <ns0:cNvPr id="4" name="What is the difference between a fixed charge and a price pe">
+          <ns0:cNvPr id="4" name="Compare explanations with a partner.">
             <ns1:extLst>
               <ns1:ext uri="{FF2B5EF4-FFF2-40B4-BE49-F238E27FC236}">
-                <ns2:creationId id="{86888079-15DC-4EC1-A560-E19BB53576A1}"/>
+                <ns2:creationId id="{71DAF422-1E36-486C-BD27-55BDA01197FF}"/>
               </ns1:ext>
             </ns1:extLst>
           </ns0:cNvPr>
@@ -4009,17 +4049,83 @@
                 <ns1:ea typeface="Arial"/>
                 <ns1:cs typeface="Arial"/>
               </ns1:rPr>
-              <ns1:t>What is the difference between a fixed charge and a price per item?</ns1:t>
+              <ns1:t>Compare explanations with a partner.</ns1:t>
             </ns1:r>
           </ns1:p>
         </ns0:txBody>
       </ns0:sp>
       <ns0:sp>
         <ns0:nvSpPr>
-          <ns0:cNvPr id="5" name="U1-W01-L04  ·  2/8  ·  Content CC BY 4.0 / code MIT">
+          <ns0:cNvPr id="5" name="Add one detail that makes your answer clearer.">
             <ns1:extLst>
               <ns1:ext uri="{FF2B5EF4-FFF2-40B4-BE49-F238E27FC236}">
-                <ns2:creationId id="{608EF38C-6DDC-47EF-8553-CC9F3AFFC73C}"/>
+                <ns2:creationId id="{547BBC56-92EB-41F7-B684-25258A0516F1}"/>
+              </ns1:ext>
+            </ns1:extLst>
+          </ns0:cNvPr>
+          <ns0:cNvSpPr>
+            <ns1:spLocks noGrp="1"/>
+          </ns0:cNvSpPr>
+          <ns0:nvPr/>
+        </ns0:nvSpPr>
+        <ns0:spPr>
+          <ns1:xfrm>
+            <ns1:off x="685800" y="4305300"/>
+            <ns1:ext cx="10820400" cy="714375"/>
+          </ns1:xfrm>
+          <ns1:prstGeom prst="rect">
+            <ns1:avLst/>
+          </ns1:prstGeom>
+          <ns1:noFill/>
+          <ns1:ln w="0">
+            <ns1:noFill/>
+          </ns1:ln>
+        </ns0:spPr>
+        <ns0:txBody>
+          <ns1:bodyPr/>
+          <ns1:lstStyle>
+            <ns1:defPPr>
+              <ns1:defRPr sz="2400" b="0">
+                <ns1:solidFill>
+                  <ns1:srgbClr val="18322D"/>
+                </ns1:solidFill>
+                <ns1:latin typeface="Arial"/>
+                <ns1:ea typeface="Arial"/>
+                <ns1:cs typeface="Arial"/>
+              </ns1:defRPr>
+            </ns1:defPPr>
+          </ns1:lstStyle>
+          <ns1:p>
+            <ns1:pPr>
+              <ns1:defRPr sz="2400" b="0">
+                <ns1:solidFill>
+                  <ns1:srgbClr val="18322D"/>
+                </ns1:solidFill>
+                <ns1:latin typeface="Arial"/>
+                <ns1:ea typeface="Arial"/>
+                <ns1:cs typeface="Arial"/>
+              </ns1:defRPr>
+            </ns1:pPr>
+            <ns1:r>
+              <ns1:rPr sz="2400" b="0">
+                <ns1:solidFill>
+                  <ns1:srgbClr val="18322D"/>
+                </ns1:solidFill>
+                <ns1:latin typeface="Arial"/>
+                <ns1:ea typeface="Arial"/>
+                <ns1:cs typeface="Arial"/>
+              </ns1:rPr>
+              <ns1:t>Add one detail that makes your answer clearer.</ns1:t>
+            </ns1:r>
+          </ns1:p>
+        </ns0:txBody>
+      </ns0:sp>
+      <ns0:sp>
+        <ns0:nvSpPr>
+          <ns0:cNvPr id="6" name="U1-W01-L04  ·  2/8  ·  Content CC BY 4.0 / code MIT">
+            <ns1:extLst>
+              <ns1:ext uri="{FF2B5EF4-FFF2-40B4-BE49-F238E27FC236}">
+                <ns2:creationId id="{40A68CF3-C0FA-4595-B604-A4F76ACC9DCB}"/>
               </ns1:ext>
             </ns1:extLst>
           </ns0:cNvPr>
@@ -4083,7 +4189,7 @@
     </ns0:spTree>
     <ns0:extLst>
       <ns0:ext uri="{BB962C8B-B14F-4D97-AF65-F5344CB8AC3E}">
-        <ns3:creationId val="1900373025"/>
+        <ns3:creationId val="1589103086"/>
       </ns0:ext>
     </ns0:extLst>
   </ns0:cSld>
@@ -4114,7 +4220,7 @@
           <ns0:cNvPr id="7" name="The book-cover requirement">
             <ns1:extLst>
               <ns1:ext uri="{FF2B5EF4-FFF2-40B4-BE49-F238E27FC236}">
-                <ns2:creationId id="{FF713AEB-7088-40EF-B218-3B6C0EC589AF}"/>
+                <ns2:creationId id="{9201AF93-9E0B-4A48-9208-AAC97F8C5670}"/>
               </ns1:ext>
             </ns1:extLst>
           </ns0:cNvPr>
@@ -4182,7 +4288,7 @@
           <ns0:cNvPr id="2" name="Each book cover costs $2.">
             <ns1:extLst>
               <ns1:ext uri="{FF2B5EF4-FFF2-40B4-BE49-F238E27FC236}">
-                <ns2:creationId id="{2552F8EC-E9AC-41B7-A561-0438172CE5BB}"/>
+                <ns2:creationId id="{592FDC38-D67D-4672-8835-EAF99B487CC8}"/>
               </ns1:ext>
             </ns1:extLst>
           </ns0:cNvPr>
@@ -4248,7 +4354,7 @@
           <ns0:cNvPr id="3" name="Every order has a $4 handling charge.">
             <ns1:extLst>
               <ns1:ext uri="{FF2B5EF4-FFF2-40B4-BE49-F238E27FC236}">
-                <ns2:creationId id="{36246A9C-7A4F-4126-B4B5-00BD4CBBBF9B}"/>
+                <ns2:creationId id="{8ABA5FE2-065C-41CA-9983-0EC0C73C1F83}"/>
               </ns1:ext>
             </ns1:extLst>
           </ns0:cNvPr>
@@ -4314,7 +4420,7 @@
           <ns0:cNvPr id="4" name="The handling charge also applies to a zero-cover order.">
             <ns1:extLst>
               <ns1:ext uri="{FF2B5EF4-FFF2-40B4-BE49-F238E27FC236}">
-                <ns2:creationId id="{1664181A-ED26-476A-BD93-5168AC5CA6B2}"/>
+                <ns2:creationId id="{DC3188D2-59CC-4E1C-B5CB-9599CD5AD547}"/>
               </ns1:ext>
             </ns1:extLst>
           </ns0:cNvPr>
@@ -4380,7 +4486,7 @@
           <ns0:cNvPr id="5" name="Assume the quantity is a whole number of zero or more.">
             <ns1:extLst>
               <ns1:ext uri="{FF2B5EF4-FFF2-40B4-BE49-F238E27FC236}">
-                <ns2:creationId id="{FFD30711-62A5-4E42-8005-A09444ED6FD3}"/>
+                <ns2:creationId id="{DDB33691-F1B7-4494-9743-1397459D90A7}"/>
               </ns1:ext>
             </ns1:extLst>
           </ns0:cNvPr>
@@ -4446,7 +4552,7 @@
           <ns0:cNvPr id="6" name="U1-W01-L04  ·  3/8  ·  Content CC BY 4.0 / code MIT">
             <ns1:extLst>
               <ns1:ext uri="{FF2B5EF4-FFF2-40B4-BE49-F238E27FC236}">
-                <ns2:creationId id="{477057D6-BF4D-4D6A-B5AA-79CE09A84B92}"/>
+                <ns2:creationId id="{00C9D5CC-9A87-4908-931A-6813BFC16ADB}"/>
               </ns1:ext>
             </ns1:extLst>
           </ns0:cNvPr>
@@ -4510,7 +4616,7 @@
     </ns0:spTree>
     <ns0:extLst>
       <ns0:ext uri="{BB962C8B-B14F-4D97-AF65-F5344CB8AC3E}">
-        <ns3:creationId val="1353421486"/>
+        <ns3:creationId val="2006877690"/>
       </ns0:ext>
     </ns0:extLst>
   </ns0:cSld>
@@ -4541,7 +4647,7 @@
           <ns0:cNvPr id="7" name="Design before coding">
             <ns1:extLst>
               <ns1:ext uri="{FF2B5EF4-FFF2-40B4-BE49-F238E27FC236}">
-                <ns2:creationId id="{98D25DAF-ABDF-4AAB-A6BE-F586A5713FFC}"/>
+                <ns2:creationId id="{F0B0137A-CF71-4C12-AD20-91A10C0A15D6}"/>
               </ns1:ext>
             </ns1:extLst>
           </ns0:cNvPr>
@@ -4606,10 +4712,10 @@
       </ns0:sp>
       <ns0:sp>
         <ns0:nvSpPr>
-          <ns0:cNvPr id="2" name="Input: what must the user enter?">
+          <ns0:cNvPr id="2" name="Draft your own input, processing and output plan.">
             <ns1:extLst>
               <ns1:ext uri="{FF2B5EF4-FFF2-40B4-BE49-F238E27FC236}">
-                <ns2:creationId id="{17B086FF-FDF6-4A60-A5D5-2AC3D1C770E2}"/>
+                <ns2:creationId id="{C9A69C0A-7D3B-44D3-8343-4F37A5B3BC1A}"/>
               </ns1:ext>
             </ns1:extLst>
           </ns0:cNvPr>
@@ -4665,17 +4771,17 @@
                 <ns1:ea typeface="Arial"/>
                 <ns1:cs typeface="Arial"/>
               </ns1:rPr>
-              <ns1:t>Input: what must the user enter?</ns1:t>
+              <ns1:t>Draft your own input, processing and output plan.</ns1:t>
             </ns1:r>
           </ns1:p>
         </ns0:txBody>
       </ns0:sp>
       <ns0:sp>
         <ns0:nvSpPr>
-          <ns0:cNvPr id="3" name="Processing: write the calculation in words.">
+          <ns0:cNvPr id="3" name="Write the calculation in words.">
             <ns1:extLst>
               <ns1:ext uri="{FF2B5EF4-FFF2-40B4-BE49-F238E27FC236}">
-                <ns2:creationId id="{CE36569F-24C8-4C4B-83BE-CF6020F42C7C}"/>
+                <ns2:creationId id="{883A7B75-EC10-46ED-B949-F38DD846BAAD}"/>
               </ns1:ext>
             </ns1:extLst>
           </ns0:cNvPr>
@@ -4731,17 +4837,17 @@
                 <ns1:ea typeface="Arial"/>
                 <ns1:cs typeface="Arial"/>
               </ns1:rPr>
-              <ns1:t>Processing: write the calculation in words.</ns1:t>
+              <ns1:t>Write the calculation in words.</ns1:t>
             </ns1:r>
           </ns1:p>
         </ns0:txBody>
       </ns0:sp>
       <ns0:sp>
         <ns0:nvSpPr>
-          <ns0:cNvPr id="4" name="Output: what should the program display?">
+          <ns0:cNvPr id="4" name="Ask a partner to follow the steps for two covers.">
             <ns1:extLst>
               <ns1:ext uri="{FF2B5EF4-FFF2-40B4-BE49-F238E27FC236}">
-                <ns2:creationId id="{C23961C4-EFDB-454D-8E06-7F0A858A57B8}"/>
+                <ns2:creationId id="{9A4CA4CD-8F38-4D21-B011-FEDFF674A74D}"/>
               </ns1:ext>
             </ns1:extLst>
           </ns0:cNvPr>
@@ -4797,17 +4903,17 @@
                 <ns1:ea typeface="Arial"/>
                 <ns1:cs typeface="Arial"/>
               </ns1:rPr>
-              <ns1:t>Output: what should the program display?</ns1:t>
+              <ns1:t>Ask a partner to follow the steps for two covers.</ns1:t>
             </ns1:r>
           </ns1:p>
         </ns0:txBody>
       </ns0:sp>
       <ns0:sp>
         <ns0:nvSpPr>
-          <ns0:cNvPr id="5" name="Choose meaningful names for the two fixed values.">
+          <ns0:cNvPr id="5" name="Revise your plan before coding.">
             <ns1:extLst>
               <ns1:ext uri="{FF2B5EF4-FFF2-40B4-BE49-F238E27FC236}">
-                <ns2:creationId id="{3CAE81B0-6590-4F8C-8C3D-65751347E25A}"/>
+                <ns2:creationId id="{565C968E-A541-4142-A007-8CE86D382E4F}"/>
               </ns1:ext>
             </ns1:extLst>
           </ns0:cNvPr>
@@ -4863,7 +4969,7 @@
                 <ns1:ea typeface="Arial"/>
                 <ns1:cs typeface="Arial"/>
               </ns1:rPr>
-              <ns1:t>Choose meaningful names for the two fixed values.</ns1:t>
+              <ns1:t>Revise your plan before coding.</ns1:t>
             </ns1:r>
           </ns1:p>
         </ns0:txBody>
@@ -4873,7 +4979,7 @@
           <ns0:cNvPr id="6" name="U1-W01-L04  ·  4/8  ·  Content CC BY 4.0 / code MIT">
             <ns1:extLst>
               <ns1:ext uri="{FF2B5EF4-FFF2-40B4-BE49-F238E27FC236}">
-                <ns2:creationId id="{D3FD1878-1C0A-4BDB-B31F-83E2913A0C5A}"/>
+                <ns2:creationId id="{F7C766A4-4AC9-4279-BA2D-898DFA23B512}"/>
               </ns1:ext>
             </ns1:extLst>
           </ns0:cNvPr>
@@ -4937,7 +5043,7 @@
     </ns0:spTree>
     <ns0:extLst>
       <ns0:ext uri="{BB962C8B-B14F-4D97-AF65-F5344CB8AC3E}">
-        <ns3:creationId val="1814448794"/>
+        <ns3:creationId val="2087666089"/>
       </ns0:ext>
     </ns0:extLst>
   </ns0:cSld>
@@ -4965,10 +5071,10 @@
       </ns0:grpSpPr>
       <ns0:sp>
         <ns0:nvSpPr>
-          <ns0:cNvPr id="4" name="Calculate expected results">
+          <ns0:cNvPr id="4" name="Expected results come from the rule">
             <ns1:extLst>
               <ns1:ext uri="{FF2B5EF4-FFF2-40B4-BE49-F238E27FC236}">
-                <ns2:creationId id="{F80802FB-A4E5-4BC5-BF0D-57AB7BAA4750}"/>
+                <ns2:creationId id="{4CFD305D-12B4-4A64-82D1-628FB11ECF49}"/>
               </ns1:ext>
             </ns1:extLst>
           </ns0:cNvPr>
@@ -5026,7 +5132,7 @@
                 <ns1:ea typeface="Arial"/>
                 <ns1:cs typeface="Arial"/>
               </ns1:rPr>
-              <ns1:t>Calculate expected results</ns1:t>
+              <ns1:t>Expected results come from the rule</ns1:t>
             </ns1:r>
           </ns1:p>
         </ns0:txBody>
@@ -5036,7 +5142,7 @@
           <ns0:cNvPr id="2" name="">
             <ns1:extLst>
               <ns1:ext uri="{FF2B5EF4-FFF2-40B4-BE49-F238E27FC236}">
-                <ns2:creationId id="{B44D9077-9EDB-4D70-A5BB-FC59DCA8E85D}"/>
+                <ns2:creationId id="{60C10F47-3D25-46AA-8A9B-B33FAE0F3243}"/>
               </ns1:ext>
             </ns1:extLst>
           </ns0:cNvPr>
@@ -5247,7 +5353,7 @@
                           <ns1:ea typeface="Arial"/>
                           <ns1:cs typeface="Arial"/>
                         </ns1:rPr>
-                        <ns1:t>0 × 2 + 4</ns1:t>
+                        <ns1:t>Calculate on paper</ns1:t>
                       </ns1:r>
                     </ns1:p>
                   </ns1:txBody>
@@ -5283,7 +5389,7 @@
                           <ns1:ea typeface="Arial"/>
                           <ns1:cs typeface="Arial"/>
                         </ns1:rPr>
-                        <ns1:t>$4</ns1:t>
+                        <ns1:t>Record prediction</ns1:t>
                       </ns1:r>
                     </ns1:p>
                   </ns1:txBody>
@@ -5363,7 +5469,7 @@
                           <ns1:ea typeface="Arial"/>
                           <ns1:cs typeface="Arial"/>
                         </ns1:rPr>
-                        <ns1:t>1 × 2 + 4</ns1:t>
+                        <ns1:t>Calculate on paper</ns1:t>
                       </ns1:r>
                     </ns1:p>
                   </ns1:txBody>
@@ -5399,7 +5505,7 @@
                           <ns1:ea typeface="Arial"/>
                           <ns1:cs typeface="Arial"/>
                         </ns1:rPr>
-                        <ns1:t>$6</ns1:t>
+                        <ns1:t>Record prediction</ns1:t>
                       </ns1:r>
                     </ns1:p>
                   </ns1:txBody>
@@ -5479,7 +5585,7 @@
                           <ns1:ea typeface="Arial"/>
                           <ns1:cs typeface="Arial"/>
                         </ns1:rPr>
-                        <ns1:t>5 × 2 + 4</ns1:t>
+                        <ns1:t>Calculate on paper</ns1:t>
                       </ns1:r>
                     </ns1:p>
                   </ns1:txBody>
@@ -5515,7 +5621,7 @@
                           <ns1:ea typeface="Arial"/>
                           <ns1:cs typeface="Arial"/>
                         </ns1:rPr>
-                        <ns1:t>$14</ns1:t>
+                        <ns1:t>Record prediction</ns1:t>
                       </ns1:r>
                     </ns1:p>
                   </ns1:txBody>
@@ -5547,7 +5653,7 @@
           <ns0:cNvPr id="3" name="U1-W01-L04  ·  5/8  ·  Content CC BY 4.0 / code MIT">
             <ns1:extLst>
               <ns1:ext uri="{FF2B5EF4-FFF2-40B4-BE49-F238E27FC236}">
-                <ns2:creationId id="{B2AE793B-24D5-41F4-929F-850FE2451B10}"/>
+                <ns2:creationId id="{A377C824-D003-4BD2-ABAB-16B8B3E45322}"/>
               </ns1:ext>
             </ns1:extLst>
           </ns0:cNvPr>
@@ -5611,7 +5717,7 @@
     </ns0:spTree>
     <ns0:extLst>
       <ns0:ext uri="{BB962C8B-B14F-4D97-AF65-F5344CB8AC3E}">
-        <ns3:creationId val="1032756737"/>
+        <ns3:creationId val="65423888"/>
       </ns0:ext>
     </ns0:extLst>
   </ns0:cSld>
@@ -5639,10 +5745,10 @@
       </ns0:grpSpPr>
       <ns0:sp>
         <ns0:nvSpPr>
-          <ns0:cNvPr id="7" name="Implement your plan">
+          <ns0:cNvPr id="7" name="Your own working calculator">
             <ns1:extLst>
               <ns1:ext uri="{FF2B5EF4-FFF2-40B4-BE49-F238E27FC236}">
-                <ns2:creationId id="{28140278-63FF-4C3F-8B18-1DF27AC9E6DF}"/>
+                <ns2:creationId id="{5A4B666B-D3CA-47A1-AD7F-ACBF9AE72AD7}"/>
               </ns1:ext>
             </ns1:extLst>
           </ns0:cNvPr>
@@ -5700,7 +5806,7 @@
                 <ns1:ea typeface="Arial"/>
                 <ns1:cs typeface="Arial"/>
               </ns1:rPr>
-              <ns1:t>Implement your plan</ns1:t>
+              <ns1:t>Your own working calculator</ns1:t>
             </ns1:r>
           </ns1:p>
         </ns0:txBody>
@@ -5710,7 +5816,7 @@
           <ns0:cNvPr id="2" name="Create and save cover_cost.py.">
             <ns1:extLst>
               <ns1:ext uri="{FF2B5EF4-FFF2-40B4-BE49-F238E27FC236}">
-                <ns2:creationId id="{0E728035-8942-4D50-9D0A-25844DB2455F}"/>
+                <ns2:creationId id="{A182DE70-CAB6-4405-B7E4-1D3C1E28A32C}"/>
               </ns1:ext>
             </ns1:extLst>
           </ns0:cNvPr>
@@ -5773,10 +5879,10 @@
       </ns0:sp>
       <ns0:sp>
         <ns0:nvSpPr>
-          <ns0:cNvPr id="3" name="Read and convert the quantity.">
+          <ns0:cNvPr id="3" name="Use your plan to write the calculation.">
             <ns1:extLst>
               <ns1:ext uri="{FF2B5EF4-FFF2-40B4-BE49-F238E27FC236}">
-                <ns2:creationId id="{8FEAFE2F-2429-4749-ACB1-34BEC7431E93}"/>
+                <ns2:creationId id="{03E9582E-BE31-4635-BB03-8375FBE54791}"/>
               </ns1:ext>
             </ns1:extLst>
           </ns0:cNvPr>
@@ -5832,17 +5938,17 @@
                 <ns1:ea typeface="Arial"/>
                 <ns1:cs typeface="Arial"/>
               </ns1:rPr>
-              <ns1:t>Read and convert the quantity.</ns1:t>
+              <ns1:t>Use your plan to write the calculation.</ns1:t>
             </ns1:r>
           </ns1:p>
         </ns0:txBody>
       </ns0:sp>
       <ns0:sp>
         <ns0:nvSpPr>
-          <ns0:cNvPr id="4" name="Calculate the total using your named values.">
+          <ns0:cNvPr id="4" name="Display a labelled result and run your tests.">
             <ns1:extLst>
               <ns1:ext uri="{FF2B5EF4-FFF2-40B4-BE49-F238E27FC236}">
-                <ns2:creationId id="{1164CA96-1E85-4DE4-8464-33AF9D2C13BC}"/>
+                <ns2:creationId id="{879CA643-C116-4A09-A302-19D3574729A4}"/>
               </ns1:ext>
             </ns1:extLst>
           </ns0:cNvPr>
@@ -5898,17 +6004,17 @@
                 <ns1:ea typeface="Arial"/>
                 <ns1:cs typeface="Arial"/>
               </ns1:rPr>
-              <ns1:t>Calculate the total using your named values.</ns1:t>
+              <ns1:t>Display a labelled result and run your tests.</ns1:t>
             </ns1:r>
           </ns1:p>
         </ns0:txBody>
       </ns0:sp>
       <ns0:sp>
         <ns0:nvSpPr>
-          <ns0:cNvPr id="5" name="Display a clearly labelled result; run your three tests.">
+          <ns0:cNvPr id="5" name="Record actual results beside your predictions.">
             <ns1:extLst>
               <ns1:ext uri="{FF2B5EF4-FFF2-40B4-BE49-F238E27FC236}">
-                <ns2:creationId id="{0711A797-E0E3-4B06-8A06-00A28A94DB9E}"/>
+                <ns2:creationId id="{FA8EBFF5-202E-46F9-A610-7C87A335B2C7}"/>
               </ns1:ext>
             </ns1:extLst>
           </ns0:cNvPr>
@@ -5964,7 +6070,7 @@
                 <ns1:ea typeface="Arial"/>
                 <ns1:cs typeface="Arial"/>
               </ns1:rPr>
-              <ns1:t>Display a clearly labelled result; run your three tests.</ns1:t>
+              <ns1:t>Record actual results beside your predictions.</ns1:t>
             </ns1:r>
           </ns1:p>
         </ns0:txBody>
@@ -5974,7 +6080,7 @@
           <ns0:cNvPr id="6" name="U1-W01-L04  ·  6/8  ·  Content CC BY 4.0 / code MIT">
             <ns1:extLst>
               <ns1:ext uri="{FF2B5EF4-FFF2-40B4-BE49-F238E27FC236}">
-                <ns2:creationId id="{9CF62A4F-E6E1-4D87-A0FB-D662A061CDE2}"/>
+                <ns2:creationId id="{545AA6AF-2D97-4AD6-8912-6EA23345673D}"/>
               </ns1:ext>
             </ns1:extLst>
           </ns0:cNvPr>
@@ -6038,7 +6144,7 @@
     </ns0:spTree>
     <ns0:extLst>
       <ns0:ext uri="{BB962C8B-B14F-4D97-AF65-F5344CB8AC3E}">
-        <ns3:creationId val="248318910"/>
+        <ns3:creationId val="1896124444"/>
       </ns0:ext>
     </ns0:extLst>
   </ns0:cSld>
@@ -6066,10 +6172,10 @@
       </ns0:grpSpPr>
       <ns0:sp>
         <ns0:nvSpPr>
-          <ns0:cNvPr id="7" name="Explain your evidence">
+          <ns0:cNvPr id="7" name="Feedback that leads to a revision">
             <ns1:extLst>
               <ns1:ext uri="{FF2B5EF4-FFF2-40B4-BE49-F238E27FC236}">
-                <ns2:creationId id="{5E54B588-9E0C-4B47-98EF-EAA10F46899C}"/>
+                <ns2:creationId id="{49950A04-B56E-4D33-A1B9-A5C63CF09AE7}"/>
               </ns1:ext>
             </ns1:extLst>
           </ns0:cNvPr>
@@ -6127,17 +6233,17 @@
                 <ns1:ea typeface="Arial"/>
                 <ns1:cs typeface="Arial"/>
               </ns1:rPr>
-              <ns1:t>Explain your evidence</ns1:t>
+              <ns1:t>Feedback that leads to a revision</ns1:t>
             </ns1:r>
           </ns1:p>
         </ns0:txBody>
       </ns0:sp>
       <ns0:sp>
         <ns0:nvSpPr>
-          <ns0:cNvPr id="2" name="Show expected and actual results side by side.">
+          <ns0:cNvPr id="2" name="Show a partner one prediction and actual result.">
             <ns1:extLst>
               <ns1:ext uri="{FF2B5EF4-FFF2-40B4-BE49-F238E27FC236}">
-                <ns2:creationId id="{30AAAEB8-CEAD-4BD7-9FE7-92758EB6214F}"/>
+                <ns2:creationId id="{474AE58F-0795-4D1A-813E-6FFEDDB9A815}"/>
               </ns1:ext>
             </ns1:extLst>
           </ns0:cNvPr>
@@ -6193,17 +6299,17 @@
                 <ns1:ea typeface="Arial"/>
                 <ns1:cs typeface="Arial"/>
               </ns1:rPr>
-              <ns1:t>Show expected and actual results side by side.</ns1:t>
+              <ns1:t>Show a partner one prediction and actual result.</ns1:t>
             </ns1:r>
           </ns1:p>
         </ns0:txBody>
       </ns0:sp>
       <ns0:sp>
         <ns0:nvSpPr>
-          <ns0:cNvPr id="3" name="If a result differs, find the first wrong step.">
+          <ns0:cNvPr id="3" name="Explain why handling is added once.">
             <ns1:extLst>
               <ns1:ext uri="{FF2B5EF4-FFF2-40B4-BE49-F238E27FC236}">
-                <ns2:creationId id="{96579814-E18B-4CC4-9421-EEC7F1A27183}"/>
+                <ns2:creationId id="{EE86B0B9-BE63-43BB-8EB6-74F57BE57F3A}"/>
               </ns1:ext>
             </ns1:extLst>
           </ns0:cNvPr>
@@ -6259,17 +6365,17 @@
                 <ns1:ea typeface="Arial"/>
                 <ns1:cs typeface="Arial"/>
               </ns1:rPr>
-              <ns1:t>If a result differs, find the first wrong step.</ns1:t>
+              <ns1:t>Explain why handling is added once.</ns1:t>
             </ns1:r>
           </ns1:p>
         </ns0:txBody>
       </ns0:sp>
       <ns0:sp>
         <ns0:nvSpPr>
-          <ns0:cNvPr id="4" name="Explain why the handling charge is added once.">
+          <ns0:cNvPr id="4" name="Partner: ask one question about the evidence.">
             <ns1:extLst>
               <ns1:ext uri="{FF2B5EF4-FFF2-40B4-BE49-F238E27FC236}">
-                <ns2:creationId id="{5AEEDD48-F517-42FA-9EF0-489B9657419E}"/>
+                <ns2:creationId id="{07E19D91-7C8F-4085-98C2-3D63B9A38305}"/>
               </ns1:ext>
             </ns1:extLst>
           </ns0:cNvPr>
@@ -6325,17 +6431,17 @@
                 <ns1:ea typeface="Arial"/>
                 <ns1:cs typeface="Arial"/>
               </ns1:rPr>
-              <ns1:t>Explain why the handling charge is added once.</ns1:t>
+              <ns1:t>Partner: ask one question about the evidence.</ns1:t>
             </ns1:r>
           </ns1:p>
         </ns0:txBody>
       </ns0:sp>
       <ns0:sp>
         <ns0:nvSpPr>
-          <ns0:cNvPr id="5" name="State one assumption or limitation.">
+          <ns0:cNvPr id="5" name="Revise one detail and name a limitation.">
             <ns1:extLst>
               <ns1:ext uri="{FF2B5EF4-FFF2-40B4-BE49-F238E27FC236}">
-                <ns2:creationId id="{21AA45FC-829A-4126-96C8-319F9D7690D1}"/>
+                <ns2:creationId id="{613F714E-13D4-4722-98BA-3ACE0DBC76C5}"/>
               </ns1:ext>
             </ns1:extLst>
           </ns0:cNvPr>
@@ -6391,7 +6497,7 @@
                 <ns1:ea typeface="Arial"/>
                 <ns1:cs typeface="Arial"/>
               </ns1:rPr>
-              <ns1:t>State one assumption or limitation.</ns1:t>
+              <ns1:t>Revise one detail and name a limitation.</ns1:t>
             </ns1:r>
           </ns1:p>
         </ns0:txBody>
@@ -6401,7 +6507,7 @@
           <ns0:cNvPr id="6" name="U1-W01-L04  ·  7/8  ·  Content CC BY 4.0 / code MIT">
             <ns1:extLst>
               <ns1:ext uri="{FF2B5EF4-FFF2-40B4-BE49-F238E27FC236}">
-                <ns2:creationId id="{6EAC490E-5742-4F32-A064-673EA20BB1D6}"/>
+                <ns2:creationId id="{2D6E9272-AA06-46DD-8379-009FAC07E7A1}"/>
               </ns1:ext>
             </ns1:extLst>
           </ns0:cNvPr>
@@ -6465,7 +6571,7 @@
     </ns0:spTree>
     <ns0:extLst>
       <ns0:ext uri="{BB962C8B-B14F-4D97-AF65-F5344CB8AC3E}">
-        <ns3:creationId val="457262415"/>
+        <ns3:creationId val="562013862"/>
       </ns0:ext>
     </ns0:extLst>
   </ns0:cSld>
@@ -6496,7 +6602,7 @@
           <ns0:cNvPr id="7" name="Exit check: a fresh quantity">
             <ns1:extLst>
               <ns1:ext uri="{FF2B5EF4-FFF2-40B4-BE49-F238E27FC236}">
-                <ns2:creationId id="{6E2FBCC0-0DFC-4DF8-80BD-4829CF188AA2}"/>
+                <ns2:creationId id="{BB372D3A-5428-4A2F-A679-D3DEB0C4CA14}"/>
               </ns1:ext>
             </ns1:extLst>
           </ns0:cNvPr>
@@ -6561,10 +6667,10 @@
       </ns0:sp>
       <ns0:sp>
         <ns0:nvSpPr>
-          <ns0:cNvPr id="2" name="Predict the cost of three book covers.">
+          <ns0:cNvPr id="2" name="Predict three covers without running the code.">
             <ns1:extLst>
               <ns1:ext uri="{FF2B5EF4-FFF2-40B4-BE49-F238E27FC236}">
-                <ns2:creationId id="{9753833D-0AB5-4669-9DB9-3D75BEE454AC}"/>
+                <ns2:creationId id="{568075C9-1349-47BF-A10F-2C71DFEE9A27}"/>
               </ns1:ext>
             </ns1:extLst>
           </ns0:cNvPr>
@@ -6620,17 +6726,17 @@
                 <ns1:ea typeface="Arial"/>
                 <ns1:cs typeface="Arial"/>
               </ns1:rPr>
-              <ns1:t>Predict the cost of three book covers.</ns1:t>
+              <ns1:t>Predict three covers without running the code.</ns1:t>
             </ns1:r>
           </ns1:p>
         </ns0:txBody>
       </ns0:sp>
       <ns0:sp>
         <ns0:nvSpPr>
-          <ns0:cNvPr id="3" name="Identify one input, processing and output step.">
+          <ns0:cNvPr id="3" name="Explain one input, processing or output line.">
             <ns1:extLst>
               <ns1:ext uri="{FF2B5EF4-FFF2-40B4-BE49-F238E27FC236}">
-                <ns2:creationId id="{7028F3C4-AD15-4992-859E-9E68E3AFE6B3}"/>
+                <ns2:creationId id="{0EE2A80E-29E2-4B74-8AD6-7E7ECAD32F44}"/>
               </ns1:ext>
             </ns1:extLst>
           </ns0:cNvPr>
@@ -6686,17 +6792,17 @@
                 <ns1:ea typeface="Arial"/>
                 <ns1:cs typeface="Arial"/>
               </ns1:rPr>
-              <ns1:t>Identify one input, processing and output step.</ns1:t>
+              <ns1:t>Explain one input, processing or output line.</ns1:t>
             </ns1:r>
           </ns1:p>
         </ns0:txBody>
       </ns0:sp>
       <ns0:sp>
         <ns0:nvSpPr>
-          <ns0:cNvPr id="4" name="Explain why this test is independent of the program.">
+          <ns0:cNvPr id="4" name="Which check helped you find or avoid an error?">
             <ns1:extLst>
               <ns1:ext uri="{FF2B5EF4-FFF2-40B4-BE49-F238E27FC236}">
-                <ns2:creationId id="{9CAD8C03-02CD-4159-97D7-6D2E31254636}"/>
+                <ns2:creationId id="{6C6BDCC4-25C1-4F00-BC1A-6B50A5179BF5}"/>
               </ns1:ext>
             </ns1:extLst>
           </ns0:cNvPr>
@@ -6752,7 +6858,7 @@
                 <ns1:ea typeface="Arial"/>
                 <ns1:cs typeface="Arial"/>
               </ns1:rPr>
-              <ns1:t>Explain why this test is independent of the program.</ns1:t>
+              <ns1:t>Which check helped you find or avoid an error?</ns1:t>
             </ns1:r>
           </ns1:p>
         </ns0:txBody>
@@ -6762,7 +6868,7 @@
           <ns0:cNvPr id="5" name="Save your script and test evidence.">
             <ns1:extLst>
               <ns1:ext uri="{FF2B5EF4-FFF2-40B4-BE49-F238E27FC236}">
-                <ns2:creationId id="{5328C33B-7BA4-410F-9B47-FB8D53DCDEA0}"/>
+                <ns2:creationId id="{9CF28AD8-A1EE-4828-B5F1-1A399AAB05F0}"/>
               </ns1:ext>
             </ns1:extLst>
           </ns0:cNvPr>
@@ -6828,7 +6934,7 @@
           <ns0:cNvPr id="6" name="U1-W01-L04  ·  8/8  ·  Content CC BY 4.0 / code MIT">
             <ns1:extLst>
               <ns1:ext uri="{FF2B5EF4-FFF2-40B4-BE49-F238E27FC236}">
-                <ns2:creationId id="{213A938D-E02E-491A-BD68-AC3AA1FDDDCD}"/>
+                <ns2:creationId id="{718C4978-53C0-4EF7-BBB2-33A6C888ED86}"/>
               </ns1:ext>
             </ns1:extLst>
           </ns0:cNvPr>
@@ -6892,7 +6998,7 @@
     </ns0:spTree>
     <ns0:extLst>
       <ns0:ext uri="{BB962C8B-B14F-4D97-AF65-F5344CB8AC3E}">
-        <ns3:creationId val="1231780281"/>
+        <ns3:creationId val="1370449923"/>
       </ns0:ext>
     </ns0:extLst>
   </ns0:cSld>
